--- a/assets/pptx/catalog-552.pptx
+++ b/assets/pptx/catalog-552.pptx
@@ -3269,7 +3269,7 @@
                 <a:ea typeface="Ebrima"/>
                 <a:cs typeface="Ebrima"/>
               </a:rPr>
-              <a:t>ኢየሱስ/አዳኝ ለሌለው (2x)</a:t>
+              <a:t>ኢየሱስ/አዳኝ ለሌለው 2x</a:t>
             </a:r>
           </a:p>
         </p:txBody>
@@ -3439,7 +3439,7 @@
                 <a:ea typeface="Ebrima"/>
                 <a:cs typeface="Ebrima"/>
               </a:rPr>
-              <a:t>ምርኩዝህ ሸንበቆ አይደለም (አይደለም) (2x)</a:t>
+              <a:t>ምርኩዝህ ሸንበቆ አይደለም አይደለም 2x</a:t>
             </a:r>
           </a:p>
           <a:p>
@@ -3457,7 +3457,7 @@
                 <a:ea typeface="Ebrima"/>
                 <a:cs typeface="Ebrima"/>
               </a:rPr>
-              <a:t>ምርኩዝሽ ሸንበቆ አይደለም (አይደለም) (2x)</a:t>
+              <a:t>ምርኩዝሽ ሸንበቆ አይደለም አይደለም 2x</a:t>
             </a:r>
           </a:p>
           <a:p>
@@ -3475,7 +3475,7 @@
                 <a:ea typeface="Ebrima"/>
                 <a:cs typeface="Ebrima"/>
               </a:rPr>
-              <a:t>አይደለም (አይደለም) (4x)</a:t>
+              <a:t>አይደለም አይደለም 4x</a:t>
             </a:r>
           </a:p>
           <a:p>
@@ -3529,7 +3529,7 @@
                 <a:ea typeface="Ebrima"/>
                 <a:cs typeface="Ebrima"/>
               </a:rPr>
-              <a:t>አይደለም (8x)</a:t>
+              <a:t>አይደለም 8x</a:t>
             </a:r>
           </a:p>
         </p:txBody>
@@ -3596,7 +3596,7 @@
                 <a:ea typeface="Ebrima"/>
                 <a:cs typeface="Ebrima"/>
               </a:rPr>
-              <a:t>ምርኩዜ ሸንበቆ አይደለም አይደለም (2x)</a:t>
+              <a:t>ምርኩዜ ሸንበቆ አይደለም አይደለም 2x</a:t>
             </a:r>
           </a:p>
           <a:p>
@@ -3614,7 +3614,7 @@
                 <a:ea typeface="Ebrima"/>
                 <a:cs typeface="Ebrima"/>
               </a:rPr>
-              <a:t>ምርኩዜ ሸንበቆ አይደለም (2x)</a:t>
+              <a:t>ምርኩዜ ሸንበቆ አይደለም 2x</a:t>
             </a:r>
           </a:p>
         </p:txBody>
@@ -3735,7 +3735,7 @@
                 <a:ea typeface="Ebrima"/>
                 <a:cs typeface="Ebrima"/>
               </a:rPr>
-              <a:t>እሚያስተማምነኝ (2x)</a:t>
+              <a:t>እሚያስተማምነኝ 2x</a:t>
             </a:r>
           </a:p>
         </p:txBody>
@@ -3820,7 +3820,7 @@
                 <a:ea typeface="Ebrima"/>
                 <a:cs typeface="Ebrima"/>
               </a:rPr>
-              <a:t>በአንተ መመካቴ እኔ አላቆምም (2x)</a:t>
+              <a:t>በአንተ መመካቴ እኔ አላቆምም 2x</a:t>
             </a:r>
           </a:p>
           <a:p>
@@ -3856,7 +3856,7 @@
                 <a:ea typeface="Ebrima"/>
                 <a:cs typeface="Ebrima"/>
               </a:rPr>
-              <a:t>እስከ መጨረሻው እኔን ታቆማለህ (2x)</a:t>
+              <a:t>እስከ መጨረሻው እኔን ታቆማለህ 2x</a:t>
             </a:r>
           </a:p>
         </p:txBody>
@@ -3941,7 +3941,7 @@
                 <a:ea typeface="Ebrima"/>
                 <a:cs typeface="Ebrima"/>
               </a:rPr>
-              <a:t>አምላክ ለሌለው (2x)</a:t>
+              <a:t>አምላክ ለሌለው 2x</a:t>
             </a:r>
           </a:p>
         </p:txBody>
@@ -4129,7 +4129,7 @@
                 <a:ea typeface="Ebrima"/>
                 <a:cs typeface="Ebrima"/>
               </a:rPr>
-              <a:t>በአንተ መመካቴ እኔ አላቋርጥም (2x)</a:t>
+              <a:t>በአንተ መመካቴ እኔ አላቋርጥም 2x</a:t>
             </a:r>
           </a:p>
           <a:p>
@@ -4165,7 +4165,7 @@
                 <a:ea typeface="Ebrima"/>
                 <a:cs typeface="Ebrima"/>
               </a:rPr>
-              <a:t>እስከ መጨረሻው ታዛልቀኛለህ (2x)</a:t>
+              <a:t>እስከ መጨረሻው ታዛልቀኛለህ 2x</a:t>
             </a:r>
           </a:p>
         </p:txBody>
@@ -4232,7 +4232,7 @@
                 <a:ea typeface="Ebrima"/>
                 <a:cs typeface="Ebrima"/>
               </a:rPr>
-              <a:t>ምርኩዜ ሸንበቆ አይደለም (አይደለም) (2x)</a:t>
+              <a:t>ምርኩዜ ሸንበቆ አይደለም አይደለም 2x</a:t>
             </a:r>
           </a:p>
           <a:p>
@@ -4250,7 +4250,7 @@
                 <a:ea typeface="Ebrima"/>
                 <a:cs typeface="Ebrima"/>
               </a:rPr>
-              <a:t>ምርኩዜ ሸንበቆ አይደለም (አይደለም) (2x)</a:t>
+              <a:t>ምርኩዜ ሸንበቆ አይደለም አይደለም 2x</a:t>
             </a:r>
           </a:p>
           <a:p>
@@ -4268,7 +4268,7 @@
                 <a:ea typeface="Ebrima"/>
                 <a:cs typeface="Ebrima"/>
               </a:rPr>
-              <a:t>ምርኩዜ ሸንበቆ አይደለም (2x)</a:t>
+              <a:t>ምርኩዜ ሸንበቆ አይደለም 2x</a:t>
             </a:r>
           </a:p>
         </p:txBody>
@@ -4353,7 +4353,7 @@
                 <a:ea typeface="Ebrima"/>
                 <a:cs typeface="Ebrima"/>
               </a:rPr>
-              <a:t>እኔስ አምላክ አለኝ እሚያስተማምነኝ (2x)</a:t>
+              <a:t>እኔስ አምላክ አለኝ እሚያስተማምነኝ 2x</a:t>
             </a:r>
           </a:p>
         </p:txBody>
